--- a/water_presentation.pptx
+++ b/water_presentation.pptx
@@ -11,7 +11,6 @@
     <p:sldId id="259" r:id="rId10"/>
     <p:sldId id="260" r:id="rId11"/>
     <p:sldId id="261" r:id="rId12"/>
-    <p:sldId id="262" r:id="rId13"/>
   </p:sldIdLst>
   <p:sldSz cx="9144000" cy="6858000" type="screen4x3"/>
   <p:notesSz cx="6858000" cy="9144000"/>
@@ -3110,7 +3109,7 @@
           <a:lstStyle/>
           <a:p>
             <a:r>
-              <a:t>Water: The Essence of Life</a:t>
+              <a:t>Water: The Source of Life</a:t>
             </a:r>
           </a:p>
         </p:txBody>
@@ -3131,7 +3130,7 @@
           <a:lstStyle/>
           <a:p>
             <a:r>
-              <a:t>An Overview</a:t>
+              <a:t>An Overview of its Importance</a:t>
             </a:r>
           </a:p>
         </p:txBody>
@@ -3170,7 +3169,7 @@
           <a:lstStyle/>
           <a:p>
             <a:r>
-              <a:t>Why is Water Important?</a:t>
+              <a:t>What is Water?</a:t>
             </a:r>
           </a:p>
         </p:txBody>
@@ -3191,19 +3190,19 @@
           <a:lstStyle/>
           <a:p>
             <a:r>
+              <a:t>A transparent, odorless, tasteless liquid.</a:t>
+            </a:r>
+          </a:p>
+          <a:p>
+            <a:pPr lvl="1"/>
+            <a:r>
+              <a:t>Chemical formula: H2O</a:t>
+            </a:r>
+          </a:p>
+          <a:p>
+            <a:pPr lvl="1"/>
+            <a:r>
               <a:t>Essential for all known forms of life.</a:t>
-            </a:r>
-          </a:p>
-          <a:p>
-            <a:pPr lvl="1"/>
-            <a:r>
-              <a:t>Covers approximately 71% of the Earth's surface.</a:t>
-            </a:r>
-          </a:p>
-          <a:p>
-            <a:pPr lvl="1"/>
-            <a:r>
-              <a:t>Crucial for agriculture, industry, and recreation.</a:t>
             </a:r>
           </a:p>
         </p:txBody>
@@ -3242,7 +3241,7 @@
           <a:lstStyle/>
           <a:p>
             <a:r>
-              <a:t>Key Properties of Water</a:t>
+              <a:t>Importance of Water</a:t>
             </a:r>
           </a:p>
         </p:txBody>
@@ -3263,25 +3262,31 @@
           <a:lstStyle/>
           <a:p>
             <a:r>
-              <a:t>Excellent Solvent: Dissolves many substances.</a:t>
+              <a:t>Human Body: ~55% to 78% water</a:t>
             </a:r>
           </a:p>
           <a:p>
             <a:pPr lvl="1"/>
             <a:r>
-              <a:t>High Heat Capacity: Regulates temperature.</a:t>
+              <a:t>Drinking water: Hydration, regulates body temperature.</a:t>
             </a:r>
           </a:p>
           <a:p>
             <a:pPr lvl="1"/>
             <a:r>
-              <a:t>Cohesion and Adhesion: Allows water to move upwards in plants.</a:t>
+              <a:t>Agriculture: Irrigation for crops.</a:t>
             </a:r>
           </a:p>
           <a:p>
             <a:pPr lvl="1"/>
             <a:r>
-              <a:t>Density: Ice is less dense than liquid water (important for aquatic life).</a:t>
+              <a:t>Industry: Cooling, cleaning, manufacturing.</a:t>
+            </a:r>
+          </a:p>
+          <a:p>
+            <a:pPr lvl="1"/>
+            <a:r>
+              <a:t>Ecosystems: Habitat for aquatic life, supports biodiversity.</a:t>
             </a:r>
           </a:p>
         </p:txBody>
@@ -3341,25 +3346,25 @@
           <a:lstStyle/>
           <a:p>
             <a:r>
-              <a:t>Evaporation: Water turns into vapor.</a:t>
+              <a:t>Evaporation: Water turns into vapor and rises.</a:t>
             </a:r>
           </a:p>
           <a:p>
             <a:pPr lvl="1"/>
             <a:r>
-              <a:t>Condensation: Water vapor forms clouds.</a:t>
+              <a:t>Condensation: Water vapor cools and forms clouds.</a:t>
             </a:r>
           </a:p>
           <a:p>
             <a:pPr lvl="1"/>
             <a:r>
-              <a:t>Precipitation: Water falls back to earth (rain, snow, etc.).</a:t>
+              <a:t>Precipitation: Water falls back to Earth as rain, snow, etc.</a:t>
             </a:r>
           </a:p>
           <a:p>
             <a:pPr lvl="1"/>
             <a:r>
-              <a:t>Collection: Water gathers in rivers, lakes, and oceans.</a:t>
+              <a:t>Collection: Water flows into rivers, lakes, and oceans.</a:t>
             </a:r>
           </a:p>
         </p:txBody>
@@ -3398,7 +3403,7 @@
           <a:lstStyle/>
           <a:p>
             <a:r>
-              <a:t>Water Pollution</a:t>
+              <a:t>Water Conservation</a:t>
             </a:r>
           </a:p>
         </p:txBody>
@@ -3419,19 +3424,31 @@
           <a:lstStyle/>
           <a:p>
             <a:r>
-              <a:t>Sources: Industrial waste, agricultural runoff, sewage.</a:t>
+              <a:t>Take shorter showers.</a:t>
             </a:r>
           </a:p>
           <a:p>
             <a:pPr lvl="1"/>
             <a:r>
-              <a:t>Impacts: Harms aquatic life, contaminates drinking water.</a:t>
+              <a:t>Fix leaky faucets.</a:t>
             </a:r>
           </a:p>
           <a:p>
             <a:pPr lvl="1"/>
             <a:r>
-              <a:t>Solutions: Wastewater treatment, reducing pollution sources, conservation.</a:t>
+              <a:t>Water your lawn less often.</a:t>
+            </a:r>
+          </a:p>
+          <a:p>
+            <a:pPr lvl="1"/>
+            <a:r>
+              <a:t>Use water-efficient appliances.</a:t>
+            </a:r>
+          </a:p>
+          <a:p>
+            <a:pPr lvl="1"/>
+            <a:r>
+              <a:t>Support water conservation efforts.</a:t>
             </a:r>
           </a:p>
         </p:txBody>
@@ -3468,84 +3485,6 @@
         <p:txBody>
           <a:bodyPr/>
           <a:lstStyle/>
-          <a:p>
-            <a:r>
-              <a:t>Water Conservation</a:t>
-            </a:r>
-          </a:p>
-        </p:txBody>
-      </p:sp>
-      <p:sp>
-        <p:nvSpPr>
-          <p:cNvPr id="3" name="Content Placeholder 2"/>
-          <p:cNvSpPr>
-            <a:spLocks noGrp="1"/>
-          </p:cNvSpPr>
-          <p:nvPr>
-            <p:ph idx="1"/>
-          </p:nvPr>
-        </p:nvSpPr>
-        <p:spPr/>
-        <p:txBody>
-          <a:bodyPr/>
-          <a:lstStyle/>
-          <a:p>
-            <a:r>
-              <a:t>Reduce water usage at home: Shorter showers, fix leaks.</a:t>
-            </a:r>
-          </a:p>
-          <a:p>
-            <a:pPr lvl="1"/>
-            <a:r>
-              <a:t>Use water-efficient appliances and fixtures.</a:t>
-            </a:r>
-          </a:p>
-          <a:p>
-            <a:pPr lvl="1"/>
-            <a:r>
-              <a:t>Conserve water in agriculture: Efficient irrigation techniques.</a:t>
-            </a:r>
-          </a:p>
-          <a:p>
-            <a:pPr lvl="1"/>
-            <a:r>
-              <a:t>Protect water resources: Prevent pollution, conserve wetlands.</a:t>
-            </a:r>
-          </a:p>
-        </p:txBody>
-      </p:sp>
-    </p:spTree>
-  </p:cSld>
-  <p:clrMapOvr>
-    <a:masterClrMapping/>
-  </p:clrMapOvr>
-</p:sld>
-</file>
-
-<file path=ppt/slides/slide7.xml><?xml version="1.0" encoding="utf-8"?>
-<p:sld xmlns:a="http://schemas.openxmlformats.org/drawingml/2006/main" xmlns:p="http://schemas.openxmlformats.org/presentationml/2006/main" xmlns:r="http://schemas.openxmlformats.org/officeDocument/2006/relationships">
-  <p:cSld>
-    <p:spTree>
-      <p:nvGrpSpPr>
-        <p:cNvPr id="1" name=""/>
-        <p:cNvGrpSpPr/>
-        <p:nvPr/>
-      </p:nvGrpSpPr>
-      <p:grpSpPr/>
-      <p:sp>
-        <p:nvSpPr>
-          <p:cNvPr id="2" name="Title 1"/>
-          <p:cNvSpPr>
-            <a:spLocks noGrp="1"/>
-          </p:cNvSpPr>
-          <p:nvPr>
-            <p:ph type="title"/>
-          </p:nvPr>
-        </p:nvSpPr>
-        <p:spPr/>
-        <p:txBody>
-          <a:bodyPr/>
-          <a:lstStyle/>
           <a:p/>
         </p:txBody>
       </p:sp>
@@ -3558,7 +3497,7 @@
         <p:spPr>
           <a:xfrm>
             <a:off x="914400" y="914400"/>
-            <a:ext cx="914400" cy="914400"/>
+            <a:ext cx="7315200" cy="4572000"/>
           </a:xfrm>
           <a:prstGeom prst="rect">
             <a:avLst/>
@@ -3570,16 +3509,17 @@
             <a:spAutoFit/>
           </a:bodyPr>
           <a:lstStyle/>
-          <a:p>
-            <a:pPr>
-              <a:defRPr sz="3000">
+          <a:p/>
+          <a:p>
+            <a:pPr algn="ctr">
+              <a:defRPr sz="4400">
                 <a:solidFill>
-                  <a:srgbClr val="000000"/>
+                  <a:srgbClr val="000080"/>
                 </a:solidFill>
               </a:defRPr>
             </a:pPr>
             <a:r>
-              <a:t>Water is a precious resource that we must protect and conserve for future generations.  Thank you.</a:t>
+              <a:t>Water is a precious resource. Let's protect it!</a:t>
             </a:r>
           </a:p>
         </p:txBody>
